--- a/module_01/Module1-Develop-Azure-Computing-Solutions.pptx
+++ b/module_01/Module1-Develop-Azure-Computing-Solutions.pptx
@@ -3109,7 +3109,51 @@
                 <a:ea typeface="Calibri" panose="020F0502020204030204"/>
                 <a:cs typeface="Calibri" panose="020F0502020204030204"/>
               </a:rPr>
-              <a:t>App Service  ·  Containers  ·  Azure Functions</a:t>
+              <a:t>App Service  ·  </a:t>
+            </a:r>
+            <a:r>
+              <a:rPr lang="en-IE" sz="1800">
+                <a:solidFill>
+                  <a:srgbClr val="CADCFC"/>
+                </a:solidFill>
+                <a:latin typeface="Calibri" panose="020F0502020204030204"/>
+                <a:ea typeface="Calibri" panose="020F0502020204030204"/>
+                <a:cs typeface="Calibri" panose="020F0502020204030204"/>
+              </a:rPr>
+              <a:t>Azure </a:t>
+            </a:r>
+            <a:r>
+              <a:rPr sz="1800">
+                <a:solidFill>
+                  <a:srgbClr val="CADCFC"/>
+                </a:solidFill>
+                <a:latin typeface="Calibri" panose="020F0502020204030204"/>
+                <a:ea typeface="Calibri" panose="020F0502020204030204"/>
+                <a:cs typeface="Calibri" panose="020F0502020204030204"/>
+              </a:rPr>
+              <a:t>Containers  </a:t>
+            </a:r>
+            <a:r>
+              <a:rPr lang="en-IE" sz="1800">
+                <a:solidFill>
+                  <a:srgbClr val="CADCFC"/>
+                </a:solidFill>
+                <a:latin typeface="Calibri" panose="020F0502020204030204"/>
+                <a:ea typeface="Calibri" panose="020F0502020204030204"/>
+                <a:cs typeface="Calibri" panose="020F0502020204030204"/>
+              </a:rPr>
+              <a:t>Apps </a:t>
+            </a:r>
+            <a:r>
+              <a:rPr sz="1800">
+                <a:solidFill>
+                  <a:srgbClr val="CADCFC"/>
+                </a:solidFill>
+                <a:latin typeface="Calibri" panose="020F0502020204030204"/>
+                <a:ea typeface="Calibri" panose="020F0502020204030204"/>
+                <a:cs typeface="Calibri" panose="020F0502020204030204"/>
+              </a:rPr>
+              <a:t>·  Azure Functions</a:t>
             </a:r>
             <a:endParaRPr sz="1800">
               <a:solidFill>
@@ -10673,86 +10717,6 @@
               <a:t>“Independent APIs, each in a container, need to scale independently on HTTP traffic and scale to zero overnight.”</a:t>
             </a:r>
             <a:endParaRPr sz="1550"/>
-          </a:p>
-        </p:txBody>
-      </p:sp>
-      <p:sp>
-        <p:nvSpPr>
-          <p:cNvPr id="6" name="Text 4"/>
-          <p:cNvSpPr>
-            <a:spLocks noGrp="1"/>
-          </p:cNvSpPr>
-          <p:nvPr/>
-        </p:nvSpPr>
-        <p:spPr>
-          <a:xfrm>
-            <a:off x="868680" y="3566160"/>
-            <a:ext cx="5486400" cy="365760"/>
-          </a:xfrm>
-          <a:prstGeom prst="rect">
-            <a:avLst/>
-          </a:prstGeom>
-          <a:noFill/>
-        </p:spPr>
-        <p:txBody>
-          <a:bodyPr wrap="square" lIns="0" tIns="0" rIns="0" bIns="0" anchor="ctr"/>
-          <a:lstStyle/>
-          <a:p>
-            <a:pPr marL="0" indent="0">
-              <a:buNone/>
-            </a:pPr>
-            <a:r>
-              <a:rPr sz="1400" b="1">
-                <a:solidFill>
-                  <a:srgbClr val="1E2761"/>
-                </a:solidFill>
-                <a:latin typeface="Calibri" panose="020F0502020204030204"/>
-                <a:ea typeface="Calibri" panose="020F0502020204030204"/>
-                <a:cs typeface="Calibri" panose="020F0502020204030204"/>
-              </a:rPr>
-              <a:t>Answer: Azure Container Apps.</a:t>
-            </a:r>
-            <a:endParaRPr sz="1400"/>
-          </a:p>
-        </p:txBody>
-      </p:sp>
-      <p:sp>
-        <p:nvSpPr>
-          <p:cNvPr id="7" name="Text 5"/>
-          <p:cNvSpPr>
-            <a:spLocks noGrp="1"/>
-          </p:cNvSpPr>
-          <p:nvPr/>
-        </p:nvSpPr>
-        <p:spPr>
-          <a:xfrm>
-            <a:off x="868680" y="3977640"/>
-            <a:ext cx="5486400" cy="868680"/>
-          </a:xfrm>
-          <a:prstGeom prst="rect">
-            <a:avLst/>
-          </a:prstGeom>
-          <a:noFill/>
-        </p:spPr>
-        <p:txBody>
-          <a:bodyPr wrap="square" lIns="0" tIns="0" rIns="0" bIns="0" anchor="ctr"/>
-          <a:lstStyle/>
-          <a:p>
-            <a:pPr marL="0" indent="0">
-              <a:buNone/>
-            </a:pPr>
-            <a:r>
-              <a:rPr sz="1200">
-                <a:solidFill>
-                  <a:srgbClr val="22223A"/>
-                </a:solidFill>
-                <a:latin typeface="Calibri" panose="020F0502020204030204"/>
-                <a:ea typeface="Calibri" panose="020F0502020204030204"/>
-                <a:cs typeface="Calibri" panose="020F0502020204030204"/>
-              </a:rPr>
-              <a:t>If a student says AKS: it COULD work, but the scenario never asked for K8s API control — extra power always means extra ops burden. Rule of thumb: if the scenario doesn't demand Kubernetes control, don't reach for Kubernetes management.</a:t>
-            </a:r>
-            <a:endParaRPr sz="1200"/>
           </a:p>
         </p:txBody>
       </p:sp>
